--- a/outputs/test_all_6_plugins.pptx
+++ b/outputs/test_all_6_plugins.pptx
@@ -3118,7 +3118,7 @@
         <p:spPr>
           <a:xfrm>
             <a:off x="548640" y="1828800"/>
-            <a:ext cx="11094415" cy="777240"/>
+            <a:ext cx="11094415" cy="868680"/>
           </a:xfrm>
           <a:prstGeom prst="rect">
             <a:avLst/>
@@ -3133,7 +3133,7 @@
           <a:p>
             <a:pPr algn="ctr"/>
             <a:r>
-              <a:rPr sz="3200" b="1">
+              <a:rPr sz="5000" b="1">
                 <a:solidFill>
                   <a:srgbClr val="FFFFFF"/>
                 </a:solidFill>
@@ -3151,7 +3151,7 @@
         </p:nvSpPr>
         <p:spPr>
           <a:xfrm>
-            <a:off x="548640" y="2697480"/>
+            <a:off x="548640" y="2788920"/>
             <a:ext cx="11091672" cy="1280160"/>
           </a:xfrm>
           <a:prstGeom prst="roundRect">
@@ -3196,7 +3196,7 @@
         </p:nvSpPr>
         <p:spPr>
           <a:xfrm>
-            <a:off x="548640" y="2697480"/>
+            <a:off x="548640" y="2788920"/>
             <a:ext cx="109728" cy="1280160"/>
           </a:xfrm>
           <a:prstGeom prst="rect">
@@ -3239,7 +3239,7 @@
         </p:nvSpPr>
         <p:spPr>
           <a:xfrm>
-            <a:off x="777240" y="2788920"/>
+            <a:off x="777240" y="2880360"/>
             <a:ext cx="10725912" cy="1097280"/>
           </a:xfrm>
           <a:prstGeom prst="rect">
@@ -3358,7 +3358,7 @@
         <p:spPr>
           <a:xfrm>
             <a:off x="548640" y="320040"/>
-            <a:ext cx="11094415" cy="502920"/>
+            <a:ext cx="11094415" cy="594360"/>
           </a:xfrm>
           <a:prstGeom prst="rect">
             <a:avLst/>
@@ -3373,7 +3373,7 @@
           <a:p>
             <a:pPr algn="l"/>
             <a:r>
-              <a:rPr sz="2200" b="1">
+              <a:rPr sz="2900" b="1">
                 <a:solidFill>
                   <a:srgbClr val="FFFFFF"/>
                 </a:solidFill>
@@ -3391,7 +3391,7 @@
         </p:nvSpPr>
         <p:spPr>
           <a:xfrm>
-            <a:off x="548640" y="914400"/>
+            <a:off x="548640" y="1005840"/>
             <a:ext cx="2601468" cy="1645920"/>
           </a:xfrm>
           <a:prstGeom prst="roundRect">
@@ -3436,7 +3436,7 @@
         </p:nvSpPr>
         <p:spPr>
           <a:xfrm>
-            <a:off x="640080" y="1051560"/>
+            <a:off x="640080" y="1143000"/>
             <a:ext cx="2418588" cy="1371600"/>
           </a:xfrm>
           <a:prstGeom prst="rect">
@@ -3501,7 +3501,7 @@
         </p:nvSpPr>
         <p:spPr>
           <a:xfrm>
-            <a:off x="3378708" y="914400"/>
+            <a:off x="3378708" y="1005840"/>
             <a:ext cx="2601468" cy="1645920"/>
           </a:xfrm>
           <a:prstGeom prst="roundRect">
@@ -3546,7 +3546,7 @@
         </p:nvSpPr>
         <p:spPr>
           <a:xfrm>
-            <a:off x="3470148" y="1051560"/>
+            <a:off x="3470148" y="1143000"/>
             <a:ext cx="2418588" cy="1371600"/>
           </a:xfrm>
           <a:prstGeom prst="rect">
@@ -3611,7 +3611,7 @@
         </p:nvSpPr>
         <p:spPr>
           <a:xfrm>
-            <a:off x="6208776" y="914400"/>
+            <a:off x="6208776" y="1005840"/>
             <a:ext cx="2601468" cy="1645920"/>
           </a:xfrm>
           <a:prstGeom prst="roundRect">
@@ -3656,7 +3656,7 @@
         </p:nvSpPr>
         <p:spPr>
           <a:xfrm>
-            <a:off x="6300216" y="1051560"/>
+            <a:off x="6300216" y="1143000"/>
             <a:ext cx="2418588" cy="1371600"/>
           </a:xfrm>
           <a:prstGeom prst="rect">
@@ -3721,7 +3721,7 @@
         </p:nvSpPr>
         <p:spPr>
           <a:xfrm>
-            <a:off x="9038844" y="914400"/>
+            <a:off x="9038844" y="1005840"/>
             <a:ext cx="2601468" cy="1645920"/>
           </a:xfrm>
           <a:prstGeom prst="roundRect">
@@ -3766,7 +3766,7 @@
         </p:nvSpPr>
         <p:spPr>
           <a:xfrm>
-            <a:off x="9130284" y="1051560"/>
+            <a:off x="9130284" y="1143000"/>
             <a:ext cx="2418588" cy="1371600"/>
           </a:xfrm>
           <a:prstGeom prst="rect">
@@ -3901,7 +3901,7 @@
         <p:spPr>
           <a:xfrm>
             <a:off x="548640" y="320040"/>
-            <a:ext cx="11094415" cy="502920"/>
+            <a:ext cx="11094415" cy="594360"/>
           </a:xfrm>
           <a:prstGeom prst="rect">
             <a:avLst/>
@@ -3916,7 +3916,7 @@
           <a:p>
             <a:pPr algn="l"/>
             <a:r>
-              <a:rPr sz="2200" b="1">
+              <a:rPr sz="2900" b="1">
                 <a:solidFill>
                   <a:srgbClr val="FFFFFF"/>
                 </a:solidFill>
@@ -3934,7 +3934,7 @@
         </p:nvSpPr>
         <p:spPr>
           <a:xfrm>
-            <a:off x="548640" y="914400"/>
+            <a:off x="548640" y="1005840"/>
             <a:ext cx="5362956" cy="2926080"/>
           </a:xfrm>
           <a:prstGeom prst="roundRect">
@@ -3979,7 +3979,7 @@
         </p:nvSpPr>
         <p:spPr>
           <a:xfrm>
-            <a:off x="685800" y="1051560"/>
+            <a:off x="685800" y="1143000"/>
             <a:ext cx="5088636" cy="2651760"/>
           </a:xfrm>
           <a:prstGeom prst="rect">
@@ -4058,7 +4058,7 @@
         </p:nvSpPr>
         <p:spPr>
           <a:xfrm>
-            <a:off x="6277356" y="914400"/>
+            <a:off x="6277356" y="1005840"/>
             <a:ext cx="5362956" cy="2926080"/>
           </a:xfrm>
           <a:prstGeom prst="roundRect">
@@ -4103,7 +4103,7 @@
         </p:nvSpPr>
         <p:spPr>
           <a:xfrm>
-            <a:off x="6414516" y="1051560"/>
+            <a:off x="6414516" y="1143000"/>
             <a:ext cx="5088636" cy="2651760"/>
           </a:xfrm>
           <a:prstGeom prst="rect">
@@ -4237,7 +4237,7 @@
         <p:spPr>
           <a:xfrm>
             <a:off x="548640" y="320040"/>
-            <a:ext cx="11094415" cy="502920"/>
+            <a:ext cx="11094415" cy="594360"/>
           </a:xfrm>
           <a:prstGeom prst="rect">
             <a:avLst/>
@@ -4252,7 +4252,7 @@
           <a:p>
             <a:pPr algn="l"/>
             <a:r>
-              <a:rPr sz="2200" b="1">
+              <a:rPr sz="2900" b="1">
                 <a:solidFill>
                   <a:srgbClr val="FFFFFF"/>
                 </a:solidFill>
@@ -4270,7 +4270,7 @@
         </p:nvSpPr>
         <p:spPr>
           <a:xfrm>
-            <a:off x="731520" y="1188720"/>
+            <a:off x="731520" y="1280160"/>
             <a:ext cx="10725912" cy="45720"/>
           </a:xfrm>
           <a:prstGeom prst="rect">
@@ -4313,7 +4313,7 @@
         </p:nvSpPr>
         <p:spPr>
           <a:xfrm>
-            <a:off x="1712214" y="1078992"/>
+            <a:off x="1712214" y="1170432"/>
             <a:ext cx="274320" cy="274320"/>
           </a:xfrm>
           <a:prstGeom prst="ellipse">
@@ -4358,7 +4358,7 @@
         </p:nvSpPr>
         <p:spPr>
           <a:xfrm>
-            <a:off x="548640" y="1463040"/>
+            <a:off x="548640" y="1554480"/>
             <a:ext cx="2601468" cy="1554480"/>
           </a:xfrm>
           <a:prstGeom prst="roundRect">
@@ -4403,7 +4403,7 @@
         </p:nvSpPr>
         <p:spPr>
           <a:xfrm>
-            <a:off x="640080" y="1554480"/>
+            <a:off x="640080" y="1645920"/>
             <a:ext cx="2418588" cy="1371600"/>
           </a:xfrm>
           <a:prstGeom prst="rect">
@@ -4469,7 +4469,7 @@
         </p:nvSpPr>
         <p:spPr>
           <a:xfrm>
-            <a:off x="4542282" y="1078992"/>
+            <a:off x="4542282" y="1170432"/>
             <a:ext cx="274320" cy="274320"/>
           </a:xfrm>
           <a:prstGeom prst="ellipse">
@@ -4514,7 +4514,7 @@
         </p:nvSpPr>
         <p:spPr>
           <a:xfrm>
-            <a:off x="3378708" y="1463040"/>
+            <a:off x="3378708" y="1554480"/>
             <a:ext cx="2601468" cy="1554480"/>
           </a:xfrm>
           <a:prstGeom prst="roundRect">
@@ -4559,7 +4559,7 @@
         </p:nvSpPr>
         <p:spPr>
           <a:xfrm>
-            <a:off x="3470148" y="1554480"/>
+            <a:off x="3470148" y="1645920"/>
             <a:ext cx="2418588" cy="1371600"/>
           </a:xfrm>
           <a:prstGeom prst="rect">
@@ -4625,7 +4625,7 @@
         </p:nvSpPr>
         <p:spPr>
           <a:xfrm>
-            <a:off x="7372350" y="1078992"/>
+            <a:off x="7372350" y="1170432"/>
             <a:ext cx="274320" cy="274320"/>
           </a:xfrm>
           <a:prstGeom prst="ellipse">
@@ -4670,7 +4670,7 @@
         </p:nvSpPr>
         <p:spPr>
           <a:xfrm>
-            <a:off x="6208776" y="1463040"/>
+            <a:off x="6208776" y="1554480"/>
             <a:ext cx="2601468" cy="1554480"/>
           </a:xfrm>
           <a:prstGeom prst="roundRect">
@@ -4715,7 +4715,7 @@
         </p:nvSpPr>
         <p:spPr>
           <a:xfrm>
-            <a:off x="6300216" y="1554480"/>
+            <a:off x="6300216" y="1645920"/>
             <a:ext cx="2418588" cy="1371600"/>
           </a:xfrm>
           <a:prstGeom prst="rect">
@@ -4781,7 +4781,7 @@
         </p:nvSpPr>
         <p:spPr>
           <a:xfrm>
-            <a:off x="10202417" y="1078992"/>
+            <a:off x="10202417" y="1170432"/>
             <a:ext cx="274320" cy="274320"/>
           </a:xfrm>
           <a:prstGeom prst="ellipse">
@@ -4826,7 +4826,7 @@
         </p:nvSpPr>
         <p:spPr>
           <a:xfrm>
-            <a:off x="9038844" y="1463040"/>
+            <a:off x="9038844" y="1554480"/>
             <a:ext cx="2601468" cy="1554480"/>
           </a:xfrm>
           <a:prstGeom prst="roundRect">
@@ -4871,7 +4871,7 @@
         </p:nvSpPr>
         <p:spPr>
           <a:xfrm>
-            <a:off x="9130284" y="1554480"/>
+            <a:off x="9130284" y="1645920"/>
             <a:ext cx="2418588" cy="1371600"/>
           </a:xfrm>
           <a:prstGeom prst="rect">
@@ -5007,7 +5007,7 @@
         <p:spPr>
           <a:xfrm>
             <a:off x="548640" y="320040"/>
-            <a:ext cx="11094415" cy="502920"/>
+            <a:ext cx="11094415" cy="594360"/>
           </a:xfrm>
           <a:prstGeom prst="rect">
             <a:avLst/>
@@ -5022,7 +5022,7 @@
           <a:p>
             <a:pPr algn="l"/>
             <a:r>
-              <a:rPr sz="2200" b="1">
+              <a:rPr sz="2900" b="1">
                 <a:solidFill>
                   <a:srgbClr val="FFFFFF"/>
                 </a:solidFill>
@@ -5040,7 +5040,7 @@
         </p:nvSpPr>
         <p:spPr>
           <a:xfrm>
-            <a:off x="548640" y="914400"/>
+            <a:off x="548640" y="1005840"/>
             <a:ext cx="11091672" cy="2926080"/>
           </a:xfrm>
           <a:prstGeom prst="roundRect">
@@ -5085,7 +5085,7 @@
         </p:nvSpPr>
         <p:spPr>
           <a:xfrm>
-            <a:off x="548640" y="914400"/>
+            <a:off x="548640" y="1005840"/>
             <a:ext cx="11091672" cy="320040"/>
           </a:xfrm>
           <a:prstGeom prst="rect">
@@ -5128,7 +5128,7 @@
         </p:nvSpPr>
         <p:spPr>
           <a:xfrm>
-            <a:off x="685800" y="932688"/>
+            <a:off x="685800" y="1024128"/>
             <a:ext cx="10817352" cy="274320"/>
           </a:xfrm>
           <a:prstGeom prst="rect">
@@ -5165,7 +5165,7 @@
         </p:nvSpPr>
         <p:spPr>
           <a:xfrm>
-            <a:off x="731520" y="1280160"/>
+            <a:off x="731520" y="1371600"/>
             <a:ext cx="10725912" cy="2514600"/>
           </a:xfrm>
           <a:prstGeom prst="rect">
@@ -5291,7 +5291,7 @@
         <p:spPr>
           <a:xfrm>
             <a:off x="548640" y="320040"/>
-            <a:ext cx="11094415" cy="502920"/>
+            <a:ext cx="11094415" cy="594360"/>
           </a:xfrm>
           <a:prstGeom prst="rect">
             <a:avLst/>
@@ -5306,7 +5306,7 @@
           <a:p>
             <a:pPr algn="l"/>
             <a:r>
-              <a:rPr sz="2200" b="1">
+              <a:rPr sz="2900" b="1">
                 <a:solidFill>
                   <a:srgbClr val="FFFFFF"/>
                 </a:solidFill>
@@ -5324,7 +5324,7 @@
         </p:nvSpPr>
         <p:spPr>
           <a:xfrm>
-            <a:off x="548640" y="914400"/>
+            <a:off x="548640" y="1005840"/>
             <a:ext cx="11091672" cy="2011680"/>
           </a:xfrm>
           <a:prstGeom prst="roundRect">
@@ -5369,7 +5369,7 @@
         </p:nvSpPr>
         <p:spPr>
           <a:xfrm>
-            <a:off x="822959" y="1188720"/>
+            <a:off x="822959" y="1280160"/>
             <a:ext cx="1097280" cy="1097280"/>
           </a:xfrm>
           <a:prstGeom prst="ellipse">
@@ -5418,7 +5418,7 @@
         </p:nvSpPr>
         <p:spPr>
           <a:xfrm>
-            <a:off x="2103120" y="1097280"/>
+            <a:off x="2103120" y="1188720"/>
             <a:ext cx="9354312" cy="1645920"/>
           </a:xfrm>
           <a:prstGeom prst="rect">
